--- a/media/resources/files/Onduktar_Akcha_Aky_Toloo_Bingo_TotQWh2.pptx
+++ b/media/resources/files/Onduktar_Akcha_Aky_Toloo_Bingo_TotQWh2.pptx
@@ -25372,7 +25372,7 @@
             </a:pPr>
             <a:r>
               <a:rPr lang="ru-RU" dirty="0"/>
-              <a:t>Турдуу пикирлер учун ыраазычылык билдиребиз.</a:t>
+              <a:t>Түрдүү пикирлер үчүн ыраазычылык билдиребиз.</a:t>
             </a:r>
           </a:p>
           <a:p>

--- a/media/resources/files/Onduktar_Akcha_Aky_Toloo_Bingo_TotQWh2.pptx
+++ b/media/resources/files/Onduktar_Akcha_Aky_Toloo_Bingo_TotQWh2.pptx
@@ -3769,7 +3769,7 @@
                 <a:ea typeface="+mn-ea"/>
                 <a:cs typeface="+mn-cs"/>
               </a:rPr>
-              <a:t>Окуучулар </a:t>
+              <a:t>Окуучулар тордон тогуз жоопту тандап, дептердеги 3х3 чакмакка каалагандай коюшат.</a:t>
             </a:r>
             <a:r>
               <a:rPr kumimoji="0" lang="ru-RU" sz="2400" b="0" i="0" u="none" strike="noStrike" kern="1200" cap="none" spc="0" normalizeH="0" baseline="0" noProof="0" dirty="0">
@@ -3786,7 +3786,7 @@
                 <a:ea typeface="+mn-ea"/>
                 <a:cs typeface="+mn-cs"/>
               </a:rPr>
-              <a:t>суроо</a:t>
+              <a:t/>
             </a:r>
             <a:r>
               <a:rPr kumimoji="0" lang="en-US" sz="2400" b="0" i="0" u="none" strike="noStrike" kern="1200" cap="none" spc="0" normalizeH="0" baseline="0" noProof="0" dirty="0">
@@ -3803,7 +3803,7 @@
                 <a:ea typeface="+mn-ea"/>
                 <a:cs typeface="+mn-cs"/>
               </a:rPr>
-              <a:t> </a:t>
+              <a:t/>
             </a:r>
             <a:r>
               <a:rPr kumimoji="0" lang="en-US" sz="2400" b="0" i="0" u="none" strike="noStrike" kern="1200" cap="none" spc="0" normalizeH="0" baseline="0" noProof="0" dirty="0" err="1">
@@ -3820,7 +3820,7 @@
                 <a:ea typeface="+mn-ea"/>
                 <a:cs typeface="+mn-cs"/>
               </a:rPr>
-              <a:t>тордон</a:t>
+              <a:t/>
             </a:r>
             <a:r>
               <a:rPr kumimoji="0" lang="en-US" sz="2400" b="0" i="0" u="none" strike="noStrike" kern="1200" cap="none" spc="0" normalizeH="0" baseline="0" noProof="0" dirty="0">
@@ -3837,7 +3837,7 @@
                 <a:ea typeface="+mn-ea"/>
                 <a:cs typeface="+mn-cs"/>
               </a:rPr>
-              <a:t> </a:t>
+              <a:t/>
             </a:r>
             <a:r>
               <a:rPr kumimoji="0" lang="en-US" sz="2000" b="0" i="0" u="none" strike="noStrike" kern="1200" cap="none" spc="0" normalizeH="0" baseline="0" noProof="0" dirty="0" err="1">
@@ -3854,7 +3854,7 @@
                 <a:ea typeface="+mn-ea"/>
                 <a:cs typeface="+mn-cs"/>
               </a:rPr>
-              <a:t>тогуз</a:t>
+              <a:t/>
             </a:r>
             <a:r>
               <a:rPr kumimoji="0" lang="en-US" sz="2000" b="0" i="0" u="none" strike="noStrike" kern="1200" cap="none" spc="0" normalizeH="0" baseline="0" noProof="0" dirty="0">
@@ -3871,7 +3871,7 @@
                 <a:ea typeface="+mn-ea"/>
                 <a:cs typeface="+mn-cs"/>
               </a:rPr>
-              <a:t> </a:t>
+              <a:t/>
             </a:r>
             <a:r>
               <a:rPr kumimoji="0" lang="en-US" sz="2000" b="0" i="0" u="none" strike="noStrike" kern="1200" cap="none" spc="0" normalizeH="0" baseline="0" noProof="0" dirty="0" err="1">
@@ -3888,7 +3888,7 @@
                 <a:ea typeface="+mn-ea"/>
                 <a:cs typeface="+mn-cs"/>
               </a:rPr>
-              <a:t>жоопту</a:t>
+              <a:t/>
             </a:r>
             <a:r>
               <a:rPr kumimoji="0" lang="en-US" sz="2000" b="0" i="0" u="none" strike="noStrike" kern="1200" cap="none" spc="0" normalizeH="0" baseline="0" noProof="0" dirty="0">
@@ -3905,7 +3905,7 @@
                 <a:ea typeface="+mn-ea"/>
                 <a:cs typeface="+mn-cs"/>
               </a:rPr>
-              <a:t> </a:t>
+              <a:t/>
             </a:r>
             <a:r>
               <a:rPr kumimoji="0" lang="en-US" sz="2000" b="0" i="0" u="none" strike="noStrike" kern="1200" cap="none" spc="0" normalizeH="0" baseline="0" noProof="0" dirty="0" err="1">
@@ -3922,7 +3922,7 @@
                 <a:ea typeface="+mn-ea"/>
                 <a:cs typeface="+mn-cs"/>
               </a:rPr>
-              <a:t>тандап</a:t>
+              <a:t/>
             </a:r>
             <a:r>
               <a:rPr kumimoji="0" lang="en-US" sz="2000" b="0" i="0" u="none" strike="noStrike" kern="1200" cap="none" spc="0" normalizeH="0" baseline="0" noProof="0" dirty="0">
@@ -3939,7 +3939,7 @@
                 <a:ea typeface="+mn-ea"/>
                 <a:cs typeface="+mn-cs"/>
               </a:rPr>
-              <a:t>, </a:t>
+              <a:t/>
             </a:r>
             <a:r>
               <a:rPr kumimoji="0" lang="en-US" sz="2000" b="0" i="0" u="none" strike="noStrike" kern="1200" cap="none" spc="0" normalizeH="0" baseline="0" noProof="0" dirty="0" err="1">
@@ -3956,7 +3956,7 @@
                 <a:ea typeface="+mn-ea"/>
                 <a:cs typeface="+mn-cs"/>
               </a:rPr>
-              <a:t>аларды</a:t>
+              <a:t/>
             </a:r>
             <a:r>
               <a:rPr kumimoji="0" lang="en-US" sz="2000" b="0" i="0" u="none" strike="noStrike" kern="1200" cap="none" spc="0" normalizeH="0" baseline="0" noProof="0" dirty="0">
@@ -3973,7 +3973,7 @@
                 <a:ea typeface="+mn-ea"/>
                 <a:cs typeface="+mn-cs"/>
               </a:rPr>
-              <a:t> </a:t>
+              <a:t/>
             </a:r>
             <a:r>
               <a:rPr kumimoji="0" lang="ru-RU" sz="2000" b="0" i="0" u="none" strike="noStrike" kern="1200" cap="none" spc="0" normalizeH="0" baseline="0" noProof="0" dirty="0">
@@ -3990,7 +3990,7 @@
                 <a:ea typeface="+mn-ea"/>
                 <a:cs typeface="+mn-cs"/>
               </a:rPr>
-              <a:t>дептериндеги</a:t>
+              <a:t/>
             </a:r>
             <a:r>
               <a:rPr kumimoji="0" lang="en-US" sz="2000" b="0" i="0" u="none" strike="noStrike" kern="1200" cap="none" spc="0" normalizeH="0" baseline="0" noProof="0" dirty="0">
@@ -4007,7 +4007,7 @@
                 <a:ea typeface="+mn-ea"/>
                 <a:cs typeface="+mn-cs"/>
               </a:rPr>
-              <a:t> 3х3 </a:t>
+              <a:t/>
             </a:r>
             <a:r>
               <a:rPr kumimoji="0" lang="en-US" sz="2000" b="0" i="0" u="none" strike="noStrike" kern="1200" cap="none" spc="0" normalizeH="0" baseline="0" noProof="0" dirty="0" err="1">
@@ -4024,7 +4024,7 @@
                 <a:ea typeface="+mn-ea"/>
                 <a:cs typeface="+mn-cs"/>
               </a:rPr>
-              <a:t>квадратка</a:t>
+              <a:t/>
             </a:r>
             <a:r>
               <a:rPr kumimoji="0" lang="en-US" sz="2000" b="0" i="0" u="none" strike="noStrike" kern="1200" cap="none" spc="0" normalizeH="0" baseline="0" noProof="0" dirty="0">
@@ -4041,7 +4041,7 @@
                 <a:ea typeface="+mn-ea"/>
                 <a:cs typeface="+mn-cs"/>
               </a:rPr>
-              <a:t> </a:t>
+              <a:t/>
             </a:r>
             <a:r>
               <a:rPr kumimoji="0" lang="en-US" sz="2000" b="0" i="0" u="none" strike="noStrike" kern="1200" cap="none" spc="0" normalizeH="0" baseline="0" noProof="0" dirty="0" err="1">
@@ -4058,7 +4058,7 @@
                 <a:ea typeface="+mn-ea"/>
                 <a:cs typeface="+mn-cs"/>
               </a:rPr>
-              <a:t>туш</a:t>
+              <a:t/>
             </a:r>
             <a:r>
               <a:rPr kumimoji="0" lang="en-US" sz="2000" b="0" i="0" u="none" strike="noStrike" kern="1200" cap="none" spc="0" normalizeH="0" baseline="0" noProof="0" dirty="0">
@@ -4075,7 +4075,7 @@
                 <a:ea typeface="+mn-ea"/>
                 <a:cs typeface="+mn-cs"/>
               </a:rPr>
-              <a:t> </a:t>
+              <a:t/>
             </a:r>
             <a:r>
               <a:rPr kumimoji="0" lang="en-US" sz="2000" b="0" i="0" u="none" strike="noStrike" kern="1200" cap="none" spc="0" normalizeH="0" baseline="0" noProof="0" dirty="0" err="1">
@@ -4092,7 +4092,7 @@
                 <a:ea typeface="+mn-ea"/>
                 <a:cs typeface="+mn-cs"/>
               </a:rPr>
-              <a:t>келди</a:t>
+              <a:t/>
             </a:r>
             <a:r>
               <a:rPr kumimoji="0" lang="en-US" sz="2000" b="0" i="0" u="none" strike="noStrike" kern="1200" cap="none" spc="0" normalizeH="0" baseline="0" noProof="0" dirty="0">
@@ -4109,7 +4109,7 @@
                 <a:ea typeface="+mn-ea"/>
                 <a:cs typeface="+mn-cs"/>
               </a:rPr>
-              <a:t> </a:t>
+              <a:t/>
             </a:r>
             <a:r>
               <a:rPr kumimoji="0" lang="en-US" sz="2000" b="0" i="0" u="none" strike="noStrike" kern="1200" cap="none" spc="0" normalizeH="0" baseline="0" noProof="0" dirty="0" err="1">
@@ -4126,7 +4126,7 @@
                 <a:ea typeface="+mn-ea"/>
                 <a:cs typeface="+mn-cs"/>
               </a:rPr>
-              <a:t>жайгаштырышы</a:t>
+              <a:t/>
             </a:r>
             <a:r>
               <a:rPr kumimoji="0" lang="en-US" sz="2000" b="0" i="0" u="none" strike="noStrike" kern="1200" cap="none" spc="0" normalizeH="0" baseline="0" noProof="0" dirty="0">
@@ -4143,7 +4143,7 @@
                 <a:ea typeface="+mn-ea"/>
                 <a:cs typeface="+mn-cs"/>
               </a:rPr>
-              <a:t> </a:t>
+              <a:t/>
             </a:r>
             <a:r>
               <a:rPr kumimoji="0" lang="en-US" sz="2000" b="0" i="0" u="none" strike="noStrike" kern="1200" cap="none" spc="0" normalizeH="0" baseline="0" noProof="0" dirty="0" err="1">
@@ -4160,7 +4160,7 @@
                 <a:ea typeface="+mn-ea"/>
                 <a:cs typeface="+mn-cs"/>
               </a:rPr>
-              <a:t>керек</a:t>
+              <a:t/>
             </a:r>
             <a:r>
               <a:rPr kumimoji="0" lang="en-US" sz="2000" b="0" i="0" u="none" strike="noStrike" kern="1200" cap="none" spc="0" normalizeH="0" baseline="0" noProof="0" dirty="0">
@@ -4177,7 +4177,7 @@
                 <a:ea typeface="+mn-ea"/>
                 <a:cs typeface="+mn-cs"/>
               </a:rPr>
-              <a:t>.</a:t>
+              <a:t/>
             </a:r>
           </a:p>
           <a:p>
@@ -5484,7 +5484,7 @@
             </a:r>
             <a:r>
               <a:rPr lang="ky-KG" sz="3200" dirty="0"/>
-              <a:t>9.50</a:t>
+              <a:t>9,50</a:t>
             </a:r>
             <a:r>
               <a:rPr lang="en-US" sz="3200" dirty="0"/>
@@ -5540,7 +5540,7 @@
             <a:pPr algn="r"/>
             <a:r>
               <a:rPr lang="en-GB" sz="4800" dirty="0"/>
-              <a:t>1501 ÷ 9.5 =</a:t>
+              <a:t>1501 ÷ 9,5 =</a:t>
             </a:r>
           </a:p>
         </p:txBody>
@@ -6455,7 +6455,7 @@
             <a:pPr algn="r"/>
             <a:r>
               <a:rPr lang="en-GB" sz="4800" dirty="0"/>
-              <a:t>(10 × 5) × 9.13 =</a:t>
+              <a:t>(10 × 5) × 9,13 =</a:t>
             </a:r>
           </a:p>
         </p:txBody>
@@ -6490,7 +6490,7 @@
           <a:p>
             <a:r>
               <a:rPr lang="en-GB" sz="4800" dirty="0"/>
-              <a:t>456.50 $</a:t>
+              <a:t>456,50 $</a:t>
             </a:r>
           </a:p>
         </p:txBody>
@@ -7374,7 +7374,7 @@
             <a:pPr algn="r"/>
             <a:r>
               <a:rPr lang="en-GB" sz="4800" dirty="0"/>
-              <a:t>7.25 × 8.15 =</a:t>
+              <a:t>7,25 × 8,15 =</a:t>
             </a:r>
           </a:p>
         </p:txBody>
@@ -7409,7 +7409,7 @@
           <a:p>
             <a:r>
               <a:rPr lang="en-GB" sz="4800" dirty="0"/>
-              <a:t>59.16 $</a:t>
+              <a:t>59,16 $</a:t>
             </a:r>
           </a:p>
         </p:txBody>
@@ -8218,7 +8218,7 @@
             <a:pPr algn="r"/>
             <a:r>
               <a:rPr lang="en-GB" sz="4800" dirty="0"/>
-              <a:t>75.90 ÷ 8.25 =</a:t>
+              <a:t>75,90 ÷ 8,25 =</a:t>
             </a:r>
           </a:p>
         </p:txBody>
@@ -8253,7 +8253,7 @@
           <a:p>
             <a:r>
               <a:rPr lang="en-GB" sz="4800" dirty="0"/>
-              <a:t>9.20</a:t>
+              <a:t>9,20</a:t>
             </a:r>
             <a:r>
               <a:rPr lang="ky-KG" sz="4800" dirty="0"/>
@@ -9209,7 +9209,7 @@
             <a:pPr algn="r"/>
             <a:r>
               <a:rPr lang="en-GB" sz="4800" dirty="0"/>
-              <a:t>63.75 ÷ 8.5 =</a:t>
+              <a:t>63,75 ÷ 8,5 =</a:t>
             </a:r>
           </a:p>
         </p:txBody>
@@ -9244,7 +9244,7 @@
           <a:p>
             <a:r>
               <a:rPr lang="en-GB" sz="4800" dirty="0"/>
-              <a:t>7.5 </a:t>
+              <a:t>7,5 </a:t>
             </a:r>
             <a:r>
               <a:rPr lang="ky-KG" sz="4800" dirty="0"/>
@@ -10163,7 +10163,7 @@
             <a:pPr algn="r"/>
             <a:r>
               <a:rPr lang="en-GB" sz="4800" dirty="0"/>
-              <a:t>37.5 × 14 =</a:t>
+              <a:t>37,5 × 14 =</a:t>
             </a:r>
           </a:p>
         </p:txBody>
@@ -10980,7 +10980,7 @@
             <a:pPr algn="r"/>
             <a:r>
               <a:rPr lang="en-GB" sz="4800" dirty="0"/>
-              <a:t>86.70 ÷ 7.5 =</a:t>
+              <a:t>86,70 ÷ 7,5 =</a:t>
             </a:r>
           </a:p>
         </p:txBody>
@@ -11015,7 +11015,7 @@
           <a:p>
             <a:r>
               <a:rPr lang="en-GB" sz="4800" dirty="0"/>
-              <a:t>11.56</a:t>
+              <a:t>11,56</a:t>
             </a:r>
             <a:r>
               <a:rPr lang="ky-KG" sz="4800" dirty="0"/>
@@ -11986,7 +11986,7 @@
             <a:pPr algn="r"/>
             <a:r>
               <a:rPr lang="en-GB" sz="4800" dirty="0"/>
-              <a:t>(8.5 × 5) × 14 =</a:t>
+              <a:t>(8,5 × 5) × 14 =</a:t>
             </a:r>
           </a:p>
         </p:txBody>
@@ -12954,7 +12954,7 @@
             <a:pPr algn="r"/>
             <a:r>
               <a:rPr lang="en-GB" sz="4800" dirty="0"/>
-              <a:t>296.48 ÷ 8.72 =</a:t>
+              <a:t>296,48 ÷ 8,72 =</a:t>
             </a:r>
           </a:p>
         </p:txBody>
@@ -13848,7 +13848,7 @@
           <a:p>
             <a:r>
               <a:rPr lang="en-GB" sz="4800" dirty="0"/>
-              <a:t>9.50</a:t>
+              <a:t>9,50</a:t>
             </a:r>
             <a:r>
               <a:rPr lang="ky-KG" sz="4800" dirty="0"/>
@@ -25533,7 +25533,7 @@
                           <a:ea typeface="+mn-ea"/>
                           <a:cs typeface="+mn-cs"/>
                         </a:rPr>
-                        <a:t>7.5</a:t>
+                        <a:t>7,5</a:t>
                       </a:r>
                     </a:p>
                   </a:txBody>
@@ -25699,7 +25699,7 @@
                           <a:ea typeface="+mn-ea"/>
                           <a:cs typeface="+mn-cs"/>
                         </a:rPr>
-                        <a:t>9.20</a:t>
+                        <a:t>9,20</a:t>
                       </a:r>
                     </a:p>
                   </a:txBody>
@@ -25859,7 +25859,7 @@
                       </a:pPr>
                       <a:r>
                         <a:rPr lang="en-GB" sz="4400" dirty="0"/>
-                        <a:t>344.80</a:t>
+                        <a:t>344,80</a:t>
                       </a:r>
                     </a:p>
                   </a:txBody>
@@ -25999,7 +25999,7 @@
                       </a:pPr>
                       <a:r>
                         <a:rPr lang="en-GB" sz="4400" dirty="0"/>
-                        <a:t>50.70</a:t>
+                        <a:t>50,70</a:t>
                       </a:r>
                     </a:p>
                   </a:txBody>
@@ -26159,7 +26159,7 @@
                           <a:ea typeface="+mn-ea"/>
                           <a:cs typeface="+mn-cs"/>
                         </a:rPr>
-                        <a:t>9.50</a:t>
+                        <a:t>9,50</a:t>
                       </a:r>
                     </a:p>
                   </a:txBody>
@@ -26242,7 +26242,7 @@
                           <a:ea typeface="+mn-ea"/>
                           <a:cs typeface="+mn-cs"/>
                         </a:rPr>
-                        <a:t>456.50</a:t>
+                        <a:t>456,50</a:t>
                       </a:r>
                     </a:p>
                   </a:txBody>
@@ -26325,7 +26325,7 @@
                           <a:ea typeface="+mn-ea"/>
                           <a:cs typeface="+mn-cs"/>
                         </a:rPr>
-                        <a:t>11.56</a:t>
+                        <a:t>11,56</a:t>
                       </a:r>
                     </a:p>
                   </a:txBody>
@@ -26408,7 +26408,7 @@
                           <a:ea typeface="+mn-ea"/>
                           <a:cs typeface="+mn-cs"/>
                         </a:rPr>
-                        <a:t>59.16</a:t>
+                        <a:t>59,16</a:t>
                       </a:r>
                     </a:p>
                   </a:txBody>
@@ -26555,7 +26555,7 @@
                       </a:pPr>
                       <a:r>
                         <a:rPr lang="en-GB" sz="4400" dirty="0"/>
-                        <a:t>10.80</a:t>
+                        <a:t>10,80</a:t>
                       </a:r>
                     </a:p>
                   </a:txBody>
@@ -30018,7 +30018,7 @@
             </a:r>
             <a:r>
               <a:rPr lang="en-GB" sz="4800" dirty="0"/>
-              <a:t>6 × 8.45 =</a:t>
+              <a:t>6 × 8,45 =</a:t>
             </a:r>
           </a:p>
         </p:txBody>
@@ -30053,7 +30053,7 @@
           <a:p>
             <a:r>
               <a:rPr lang="en-GB" sz="4800" dirty="0"/>
-              <a:t>50.70</a:t>
+              <a:t>50,70</a:t>
             </a:r>
             <a:r>
               <a:rPr lang="en-US" sz="4800" dirty="0"/>
@@ -30867,7 +30867,7 @@
             <a:pPr algn="r"/>
             <a:r>
               <a:rPr lang="en-GB" sz="4800" dirty="0"/>
-              <a:t>46.80 ÷ 6 =</a:t>
+              <a:t>46,80 ÷ 6 =</a:t>
             </a:r>
           </a:p>
         </p:txBody>
@@ -30902,7 +30902,7 @@
           <a:p>
             <a:r>
               <a:rPr lang="en-GB" sz="4800" dirty="0"/>
-              <a:t>10.80 $ </a:t>
+              <a:t>10,80 $ </a:t>
             </a:r>
             <a:r>
               <a:rPr lang="ky-KG" sz="4800" dirty="0"/>
@@ -32833,7 +32833,7 @@
             <a:pPr algn="r"/>
             <a:r>
               <a:rPr lang="en-GB" sz="4800" dirty="0"/>
-              <a:t>(8 × 5) × 8.62 =</a:t>
+              <a:t>(8 × 5) × 8,62 =</a:t>
             </a:r>
           </a:p>
         </p:txBody>
@@ -32868,7 +32868,7 @@
           <a:p>
             <a:r>
               <a:rPr lang="en-GB" sz="4800" dirty="0"/>
-              <a:t>344.80 </a:t>
+              <a:t>344,80 </a:t>
             </a:r>
             <a:r>
               <a:rPr lang="en-US" sz="4800" dirty="0"/>
